--- a/00_オリエンテーション/【AI Native研修-生成AI＆バイブコーディング】研修の概要.pptx
+++ b/00_オリエンテーション/【AI Native研修-生成AI＆バイブコーディング】研修の概要.pptx
@@ -4433,20 +4433,9 @@
           <a:p>
             <a:r>
               <a:rPr lang="ja-JP" altLang="en-US" dirty="0"/>
-              <a:t>生成</a:t>
-            </a:r>
-            <a:r>
-              <a:rPr lang="en-US" altLang="ja-JP" dirty="0"/>
-              <a:t>AI</a:t>
-            </a:r>
-            <a:r>
-              <a:rPr lang="ja-JP" altLang="en-US" dirty="0"/>
-              <a:t>＆バイブコーディング</a:t>
-            </a:r>
-            <a:r>
-              <a:rPr kumimoji="1" lang="ja-JP" altLang="en-US" dirty="0"/>
-              <a:t>の概要</a:t>
-            </a:r>
+              <a:t>研修の概要</a:t>
+            </a:r>
+            <a:endParaRPr kumimoji="1" lang="ja-JP" altLang="en-US" dirty="0"/>
           </a:p>
         </p:txBody>
       </p:sp>
